--- a/decks/geog-gis/geog-gis_ch2_what-is-gis.pptx
+++ b/decks/geog-gis/geog-gis_ch2_what-is-gis.pptx
@@ -125,30 +125,30 @@
   <p:extLst>
     <p:ext uri="{521415D9-36F7-43E2-AB2F-B90AF26B5E84}">
       <p14:sectionLst xmlns:p14="http://schemas.microsoft.com/office/powerpoint/2010/main">
-        <p14:section name="Opening" id="{21ab97cf-5e6b-6655-f515-cf8ccae05307}">
+        <p14:section name="Opening" id="{4be0e6db-ee9a-f0db-38e8-48d18e19451d}">
           <p14:sldIdLst>
             <p14:sldId id="256"/>
           </p14:sldIdLst>
         </p14:section>
-        <p14:section name="Gate" id="{10933f97-ed6e-0e4d-bc4b-f32a963a870b}">
+        <p14:section name="Gate" id="{b5c8028a-6aee-5e43-8e92-c3d334bc63a8}">
           <p14:sldIdLst>
             <p14:sldId id="257"/>
             <p14:sldId id="258"/>
           </p14:sldIdLst>
         </p14:section>
-        <p14:section name="Pre-teach" id="{b54a8c95-d01b-855f-a2fc-070cb1dba75b}">
+        <p14:section name="Pre-teach" id="{79d04787-b40f-9a28-a338-330f9bb92a90}">
           <p14:sldIdLst>
             <p14:sldId id="259"/>
             <p14:sldId id="260"/>
           </p14:sldIdLst>
         </p14:section>
-        <p14:section name="Read-along" id="{ce5013b2-1d7c-ca3e-af43-ac5c02a9bdc4}">
+        <p14:section name="Read-along" id="{92338829-4538-41f6-75cd-fbcbcd7a4c42}">
           <p14:sldIdLst>
             <p14:sldId id="261"/>
             <p14:sldId id="262"/>
           </p14:sldIdLst>
         </p14:section>
-        <p14:section name="Teach" id="{48e5a873-3c62-7a21-f35e-1a7a34499daf}">
+        <p14:section name="Teach" id="{aed10f9c-97de-f1d7-215e-7019700852b5}">
           <p14:sldIdLst>
             <p14:sldId id="263"/>
             <p14:sldId id="264"/>
@@ -156,7 +156,7 @@
             <p14:sldId id="266"/>
           </p14:sldIdLst>
         </p14:section>
-        <p14:section name="Routes" id="{71ef2ed6-6f65-1e52-2127-210769497615}">
+        <p14:section name="Routes" id="{6a56cd6e-4206-efb7-ea29-781b0e49e4c9}">
           <p14:sldIdLst>
             <p14:sldId id="267"/>
             <p14:sldId id="268"/>
@@ -164,12 +164,12 @@
             <p14:sldId id="270"/>
           </p14:sldIdLst>
         </p14:section>
-        <p14:section name="Close" id="{169e59ae-1157-cf10-09a6-b80b1afd5225}">
+        <p14:section name="Close" id="{6268d1a0-a1e6-2d52-39ed-c40566c3fafa}">
           <p14:sldIdLst>
             <p14:sldId id="271"/>
           </p14:sldIdLst>
         </p14:section>
-        <p14:section name="Answers" id="{c783cd43-348f-e0aa-fc30-e5f3c1410e94}">
+        <p14:section name="Answers" id="{39276e1b-5020-6719-7f4a-ed41a4d1f854}">
           <p14:sldIdLst>
             <p14:sldId id="272"/>
             <p14:sldId id="273"/>
@@ -2166,7 +2166,7 @@
 GIS stands for Geographic Information System. It is a computer system that stores information about places and displays it on a map. Notice that a GIS is more than a map. A paper map shows you what somebody else chose to draw. A GIS holds the data behind the map, so you can ask it questions: show me only the schools, show me where the earthquakes were this year, show me the streets with the most crime.
 Your textbook describes a GIS as having four components, and the progress check will ask you to use them. The hardware is the computer or tablet the GIS runs on. The software is the program that stores the data and draws the map. The data is the information about places. The people are the users who collect the data, ask the questions and read the results. Take any one away and there is no GIS: a computer with no data is an empty map, and data with no software is just a list.
 Your deck's stretch question asks which company provides GIS software in the UK and what the software is called. The company is Esri, and the software is ArcGIS. The version you use at school, through a web browser, is ArcGIS Online. When you log in to it, you are one of the people, your laptop is the hardware, ArcGIS Online is the software, and the layers you add are the data.
-Worked example — model it step by step, thinking aloud: Describe how to use a GIS to display a map on a computer, using the four components of a GIS. (2 marks) (1) Name all four components somewhere in your answer: hardware, software, data and people. (2) Put them in the order they are used: a person opens the software on the computer, then adds data. (3) Finish with what the software does with the data: it places each piece by its latitude and longitude and draws the map. Answer: A person (the people) opens the GIS software on a computer (the hardware) and adds the data as layers. The software uses the latitude and longitude of each piece of data to place it in the right spot and draws the map on the screen..
+Worked example — model it step by step, thinking aloud: A visitor asks what has to happen before a map can appear on a screen. Describe the part each of the four components plays. (2 marks) (1) Name all four components somewhere in your answer: hardware, software, data and people. (2) Put them in the order they are used: a person opens the software on the computer, then adds data. (3) Finish with what the software does with the data: it places each piece by its latitude and longitude and draws the map. Answer: A person (the people) opens the GIS software on a computer (the hardware) and adds the data as layers. The software uses the latitude and longitude of each piece of data to place it in the right spot and draws the map on the screen..
 Tip: Hardware, software, data, people. Say them in that order and you will not forget one.</a:t>
             </a:r>
             <a:endParaRPr lang="en-US" dirty="0"/>
@@ -2259,7 +2259,7 @@
 GIS stands for Geographic Information System. It is a computer system that stores information about places and displays it on a map. Notice that a GIS is more than a map. A paper map shows you what somebody else chose to draw. A GIS holds the data behind the map, so you can ask it questions: show me only the schools, show me where the earthquakes were this year, show me the streets with the most crime.
 Your textbook describes a GIS as having four components, and the progress check will ask you to use them. The hardware is the computer or tablet the GIS runs on. The software is the program that stores the data and draws the map. The data is the information about places. The people are the users who collect the data, ask the questions and read the results. Take any one away and there is no GIS: a computer with no data is an empty map, and data with no software is just a list.
 Your deck's stretch question asks which company provides GIS software in the UK and what the software is called. The company is Esri, and the software is ArcGIS. The version you use at school, through a web browser, is ArcGIS Online. When you log in to it, you are one of the people, your laptop is the hardware, ArcGIS Online is the software, and the layers you add are the data.
-Worked example — model it step by step, thinking aloud: Describe how to use a GIS to display a map on a computer, using the four components of a GIS. (2 marks) (1) Name all four components somewhere in your answer: hardware, software, data and people. (2) Put them in the order they are used: a person opens the software on the computer, then adds data. (3) Finish with what the software does with the data: it places each piece by its latitude and longitude and draws the map. Answer: A person (the people) opens the GIS software on a computer (the hardware) and adds the data as layers. The software uses the latitude and longitude of each piece of data to place it in the right spot and draws the map on the screen..
+Worked example — model it step by step, thinking aloud: A visitor asks what has to happen before a map can appear on a screen. Describe the part each of the four components plays. (2 marks) (1) Name all four components somewhere in your answer: hardware, software, data and people. (2) Put them in the order they are used: a person opens the software on the computer, then adds data. (3) Finish with what the software does with the data: it places each piece by its latitude and longitude and draws the map. Answer: A person (the people) opens the GIS software on a computer (the hardware) and adds the data as layers. The software uses the latitude and longitude of each piece of data to place it in the right spot and draws the map on the screen..
 Tip: Hardware, software, data, people. Say them in that order and you will not forget one.</a:t>
             </a:r>
             <a:endParaRPr lang="en-US" dirty="0"/>
@@ -17237,7 +17237,7 @@
                 <a:ea typeface="Calibri" pitchFamily="34" charset="-122"/>
                 <a:cs typeface="Calibri" pitchFamily="34" charset="-120"/>
               </a:rPr>
-              <a:t>Describe how to use a GIS to display a map on a computer, using the four components of a GIS. (2 marks)</a:t>
+              <a:t>A visitor asks what has to happen before a map can appear on a screen. Describe the part each of the four components plays. (2 marks)</a:t>
             </a:r>
             <a:endParaRPr lang="en-US" sz="2200" dirty="0"/>
           </a:p>
